--- a/memo/Octahedron Mapping.pptx
+++ b/memo/Octahedron Mapping.pptx
@@ -107,6 +107,11 @@
       </a:defRPr>
     </a:lvl9pPr>
   </p:defaultTextStyle>
+  <p:extLst>
+    <p:ext uri="{EFAFB233-063F-42B5-8137-9DF3F51BA10A}">
+      <p15:sldGuideLst xmlns:p15="http://schemas.microsoft.com/office/powerpoint/2012/main"/>
+    </p:ext>
+  </p:extLst>
 </p:presentation>
 </file>
 
@@ -241,7 +246,7 @@
           <a:p>
             <a:fld id="{9E57793F-4D4D-43EF-9F21-66D1B26ED921}" type="datetimeFigureOut">
               <a:rPr kumimoji="1" lang="ja-JP" altLang="en-US" smtClean="0"/>
-              <a:t>2025/1/17</a:t>
+              <a:t>2025/7/6</a:t>
             </a:fld>
             <a:endParaRPr kumimoji="1" lang="ja-JP" altLang="en-US"/>
           </a:p>
@@ -443,7 +448,7 @@
           <a:p>
             <a:fld id="{9E57793F-4D4D-43EF-9F21-66D1B26ED921}" type="datetimeFigureOut">
               <a:rPr kumimoji="1" lang="ja-JP" altLang="en-US" smtClean="0"/>
-              <a:t>2025/1/17</a:t>
+              <a:t>2025/7/6</a:t>
             </a:fld>
             <a:endParaRPr kumimoji="1" lang="ja-JP" altLang="en-US"/>
           </a:p>
@@ -655,7 +660,7 @@
           <a:p>
             <a:fld id="{9E57793F-4D4D-43EF-9F21-66D1B26ED921}" type="datetimeFigureOut">
               <a:rPr kumimoji="1" lang="ja-JP" altLang="en-US" smtClean="0"/>
-              <a:t>2025/1/17</a:t>
+              <a:t>2025/7/6</a:t>
             </a:fld>
             <a:endParaRPr kumimoji="1" lang="ja-JP" altLang="en-US"/>
           </a:p>
@@ -857,7 +862,7 @@
           <a:p>
             <a:fld id="{9E57793F-4D4D-43EF-9F21-66D1B26ED921}" type="datetimeFigureOut">
               <a:rPr kumimoji="1" lang="ja-JP" altLang="en-US" smtClean="0"/>
-              <a:t>2025/1/17</a:t>
+              <a:t>2025/7/6</a:t>
             </a:fld>
             <a:endParaRPr kumimoji="1" lang="ja-JP" altLang="en-US"/>
           </a:p>
@@ -1103,7 +1108,7 @@
           <a:p>
             <a:fld id="{9E57793F-4D4D-43EF-9F21-66D1B26ED921}" type="datetimeFigureOut">
               <a:rPr kumimoji="1" lang="ja-JP" altLang="en-US" smtClean="0"/>
-              <a:t>2025/1/17</a:t>
+              <a:t>2025/7/6</a:t>
             </a:fld>
             <a:endParaRPr kumimoji="1" lang="ja-JP" altLang="en-US"/>
           </a:p>
@@ -1399,7 +1404,7 @@
           <a:p>
             <a:fld id="{9E57793F-4D4D-43EF-9F21-66D1B26ED921}" type="datetimeFigureOut">
               <a:rPr kumimoji="1" lang="ja-JP" altLang="en-US" smtClean="0"/>
-              <a:t>2025/1/17</a:t>
+              <a:t>2025/7/6</a:t>
             </a:fld>
             <a:endParaRPr kumimoji="1" lang="ja-JP" altLang="en-US"/>
           </a:p>
@@ -1830,7 +1835,7 @@
           <a:p>
             <a:fld id="{9E57793F-4D4D-43EF-9F21-66D1B26ED921}" type="datetimeFigureOut">
               <a:rPr kumimoji="1" lang="ja-JP" altLang="en-US" smtClean="0"/>
-              <a:t>2025/1/17</a:t>
+              <a:t>2025/7/6</a:t>
             </a:fld>
             <a:endParaRPr kumimoji="1" lang="ja-JP" altLang="en-US"/>
           </a:p>
@@ -1948,7 +1953,7 @@
           <a:p>
             <a:fld id="{9E57793F-4D4D-43EF-9F21-66D1B26ED921}" type="datetimeFigureOut">
               <a:rPr kumimoji="1" lang="ja-JP" altLang="en-US" smtClean="0"/>
-              <a:t>2025/1/17</a:t>
+              <a:t>2025/7/6</a:t>
             </a:fld>
             <a:endParaRPr kumimoji="1" lang="ja-JP" altLang="en-US"/>
           </a:p>
@@ -2043,7 +2048,7 @@
           <a:p>
             <a:fld id="{9E57793F-4D4D-43EF-9F21-66D1B26ED921}" type="datetimeFigureOut">
               <a:rPr kumimoji="1" lang="ja-JP" altLang="en-US" smtClean="0"/>
-              <a:t>2025/1/17</a:t>
+              <a:t>2025/7/6</a:t>
             </a:fld>
             <a:endParaRPr kumimoji="1" lang="ja-JP" altLang="en-US"/>
           </a:p>
@@ -2352,7 +2357,7 @@
           <a:p>
             <a:fld id="{9E57793F-4D4D-43EF-9F21-66D1B26ED921}" type="datetimeFigureOut">
               <a:rPr kumimoji="1" lang="ja-JP" altLang="en-US" smtClean="0"/>
-              <a:t>2025/1/17</a:t>
+              <a:t>2025/7/6</a:t>
             </a:fld>
             <a:endParaRPr kumimoji="1" lang="ja-JP" altLang="en-US"/>
           </a:p>
@@ -2609,7 +2614,7 @@
           <a:p>
             <a:fld id="{9E57793F-4D4D-43EF-9F21-66D1B26ED921}" type="datetimeFigureOut">
               <a:rPr kumimoji="1" lang="ja-JP" altLang="en-US" smtClean="0"/>
-              <a:t>2025/1/17</a:t>
+              <a:t>2025/7/6</a:t>
             </a:fld>
             <a:endParaRPr kumimoji="1" lang="ja-JP" altLang="en-US"/>
           </a:p>
@@ -2854,7 +2859,7 @@
           <a:p>
             <a:fld id="{9E57793F-4D4D-43EF-9F21-66D1B26ED921}" type="datetimeFigureOut">
               <a:rPr kumimoji="1" lang="ja-JP" altLang="en-US" smtClean="0"/>
-              <a:t>2025/1/17</a:t>
+              <a:t>2025/7/6</a:t>
             </a:fld>
             <a:endParaRPr kumimoji="1" lang="ja-JP" altLang="en-US"/>
           </a:p>
@@ -3567,8 +3572,8 @@
           </a:p>
         </p:txBody>
       </p:sp>
-      <mc:AlternateContent xmlns:mc="http://schemas.openxmlformats.org/markup-compatibility/2006">
-        <mc:Choice xmlns:a14="http://schemas.microsoft.com/office/drawing/2010/main" Requires="a14">
+      <mc:AlternateContent xmlns:mc="http://schemas.openxmlformats.org/markup-compatibility/2006" xmlns:a14="http://schemas.microsoft.com/office/drawing/2010/main">
+        <mc:Choice Requires="a14">
           <p:sp>
             <p:nvSpPr>
               <p:cNvPr id="3" name="コンテンツ プレースホルダー 2">
@@ -4739,7 +4744,7 @@
             </p:txBody>
           </p:sp>
         </mc:Choice>
-        <mc:Fallback>
+        <mc:Fallback xmlns="">
           <p:sp>
             <p:nvSpPr>
               <p:cNvPr id="3" name="コンテンツ プレースホルダー 2">
@@ -5066,7 +5071,15 @@
                 </a:r>
                 <a:r>
                   <a:rPr lang="ja-JP" altLang="en-US"/>
-                  <a:t>空間での面積</a:t>
+                  <a:t>空間</a:t>
+                </a:r>
+                <a:r>
+                  <a:rPr lang="en-US" altLang="ja-JP"/>
+                  <a:t>(-1~1)</a:t>
+                </a:r>
+                <a:r>
+                  <a:rPr lang="ja-JP" altLang="en-US"/>
+                  <a:t>での面積</a:t>
                 </a:r>
                 <a:endParaRPr lang="en-US" altLang="ja-JP"/>
               </a:p>
@@ -5599,8 +5612,8 @@
           </a:p>
         </p:txBody>
       </p:sp>
-      <mc:AlternateContent xmlns:mc="http://schemas.openxmlformats.org/markup-compatibility/2006">
-        <mc:Choice xmlns:a14="http://schemas.microsoft.com/office/drawing/2010/main" Requires="a14">
+      <mc:AlternateContent xmlns:mc="http://schemas.openxmlformats.org/markup-compatibility/2006" xmlns:a14="http://schemas.microsoft.com/office/drawing/2010/main">
+        <mc:Choice Requires="a14">
           <p:sp>
             <p:nvSpPr>
               <p:cNvPr id="7" name="テキスト ボックス 6">
@@ -5629,6 +5642,7 @@
               </a:bodyPr>
               <a:lstStyle/>
               <a:p>
+                <a:pPr/>
                 <a14:m>
                   <m:oMathPara xmlns:m="http://schemas.openxmlformats.org/officeDocument/2006/math">
                     <m:oMathParaPr>
@@ -5914,7 +5928,7 @@
             </p:txBody>
           </p:sp>
         </mc:Choice>
-        <mc:Fallback>
+        <mc:Fallback xmlns="">
           <p:sp>
             <p:nvSpPr>
               <p:cNvPr id="7" name="テキスト ボックス 6">
@@ -5959,8 +5973,8 @@
           </p:sp>
         </mc:Fallback>
       </mc:AlternateContent>
-      <mc:AlternateContent xmlns:mc="http://schemas.openxmlformats.org/markup-compatibility/2006">
-        <mc:Choice xmlns:a14="http://schemas.microsoft.com/office/drawing/2010/main" Requires="a14">
+      <mc:AlternateContent xmlns:mc="http://schemas.openxmlformats.org/markup-compatibility/2006" xmlns:a14="http://schemas.microsoft.com/office/drawing/2010/main">
+        <mc:Choice Requires="a14">
           <p:sp>
             <p:nvSpPr>
               <p:cNvPr id="8" name="テキスト ボックス 7">
@@ -5989,6 +6003,7 @@
               </a:bodyPr>
               <a:lstStyle/>
               <a:p>
+                <a:pPr/>
                 <a14:m>
                   <m:oMathPara xmlns:m="http://schemas.openxmlformats.org/officeDocument/2006/math">
                     <m:oMathParaPr>
@@ -6022,7 +6037,7 @@
             </p:txBody>
           </p:sp>
         </mc:Choice>
-        <mc:Fallback>
+        <mc:Fallback xmlns="">
           <p:sp>
             <p:nvSpPr>
               <p:cNvPr id="8" name="テキスト ボックス 7">
@@ -6067,8 +6082,8 @@
           </p:sp>
         </mc:Fallback>
       </mc:AlternateContent>
-      <mc:AlternateContent xmlns:mc="http://schemas.openxmlformats.org/markup-compatibility/2006">
-        <mc:Choice xmlns:a14="http://schemas.microsoft.com/office/drawing/2010/main" Requires="a14">
+      <mc:AlternateContent xmlns:mc="http://schemas.openxmlformats.org/markup-compatibility/2006" xmlns:a14="http://schemas.microsoft.com/office/drawing/2010/main">
+        <mc:Choice Requires="a14">
           <p:sp>
             <p:nvSpPr>
               <p:cNvPr id="9" name="テキスト ボックス 8">
@@ -6097,6 +6112,7 @@
               </a:bodyPr>
               <a:lstStyle/>
               <a:p>
+                <a:pPr/>
                 <a14:m>
                   <m:oMathPara xmlns:m="http://schemas.openxmlformats.org/officeDocument/2006/math">
                     <m:oMathParaPr>
@@ -6130,7 +6146,7 @@
             </p:txBody>
           </p:sp>
         </mc:Choice>
-        <mc:Fallback>
+        <mc:Fallback xmlns="">
           <p:sp>
             <p:nvSpPr>
               <p:cNvPr id="9" name="テキスト ボックス 8">
@@ -6175,8 +6191,8 @@
           </p:sp>
         </mc:Fallback>
       </mc:AlternateContent>
-      <mc:AlternateContent xmlns:mc="http://schemas.openxmlformats.org/markup-compatibility/2006">
-        <mc:Choice xmlns:a14="http://schemas.microsoft.com/office/drawing/2010/main" Requires="a14">
+      <mc:AlternateContent xmlns:mc="http://schemas.openxmlformats.org/markup-compatibility/2006" xmlns:a14="http://schemas.microsoft.com/office/drawing/2010/main">
+        <mc:Choice Requires="a14">
           <p:sp>
             <p:nvSpPr>
               <p:cNvPr id="10" name="テキスト ボックス 9">
@@ -6205,6 +6221,7 @@
               </a:bodyPr>
               <a:lstStyle/>
               <a:p>
+                <a:pPr/>
                 <a14:m>
                   <m:oMathPara xmlns:m="http://schemas.openxmlformats.org/officeDocument/2006/math">
                     <m:oMathParaPr>
@@ -6238,7 +6255,7 @@
             </p:txBody>
           </p:sp>
         </mc:Choice>
-        <mc:Fallback>
+        <mc:Fallback xmlns="">
           <p:sp>
             <p:nvSpPr>
               <p:cNvPr id="10" name="テキスト ボックス 9">
@@ -6323,8 +6340,8 @@
           </a:fontRef>
         </p:style>
       </p:cxnSp>
-      <mc:AlternateContent xmlns:mc="http://schemas.openxmlformats.org/markup-compatibility/2006">
-        <mc:Choice xmlns:a14="http://schemas.microsoft.com/office/drawing/2010/main" Requires="a14">
+      <mc:AlternateContent xmlns:mc="http://schemas.openxmlformats.org/markup-compatibility/2006" xmlns:a14="http://schemas.microsoft.com/office/drawing/2010/main">
+        <mc:Choice Requires="a14">
           <p:sp>
             <p:nvSpPr>
               <p:cNvPr id="15" name="テキスト ボックス 14">
@@ -6353,6 +6370,7 @@
               </a:bodyPr>
               <a:lstStyle/>
               <a:p>
+                <a:pPr/>
                 <a14:m>
                   <m:oMathPara xmlns:m="http://schemas.openxmlformats.org/officeDocument/2006/math">
                     <m:oMathParaPr>
@@ -6373,7 +6391,7 @@
             </p:txBody>
           </p:sp>
         </mc:Choice>
-        <mc:Fallback>
+        <mc:Fallback xmlns="">
           <p:sp>
             <p:nvSpPr>
               <p:cNvPr id="15" name="テキスト ボックス 14">
